--- a/Report/SayarDesk_Thesis.pptx
+++ b/Report/SayarDesk_Thesis.pptx
@@ -5,7 +5,7 @@
     <p:sldMasterId id="2147483648" r:id="rId1"/>
   </p:sldMasterIdLst>
   <p:notesMasterIdLst>
-    <p:notesMasterId r:id="rId12"/>
+    <p:notesMasterId r:id="rId11"/>
   </p:notesMasterIdLst>
   <p:sldIdLst>
     <p:sldId id="256" r:id="rId2"/>
@@ -15,9 +15,8 @@
     <p:sldId id="260" r:id="rId6"/>
     <p:sldId id="261" r:id="rId7"/>
     <p:sldId id="262" r:id="rId8"/>
-    <p:sldId id="263" r:id="rId9"/>
-    <p:sldId id="264" r:id="rId10"/>
-    <p:sldId id="265" r:id="rId11"/>
+    <p:sldId id="264" r:id="rId9"/>
+    <p:sldId id="265" r:id="rId10"/>
   </p:sldIdLst>
   <p:sldSz cx="9144000" cy="5143500" type="screen16x9"/>
   <p:notesSz cx="5143500" cy="9144000"/>
@@ -292,7 +291,7 @@
           <a:p>
             <a:r>
               <a:rPr lang="en-US" dirty="0"/>
-              <a:t>"Good [morning/afternoon]. My name is Thant Thaw Tun, and today I'll be presenting my newly revised title and project: </a:t>
+              <a:t>"Good evening, everyone. I'll be presenting my newly revised title and project: </a:t>
             </a:r>
             <a:r>
               <a:rPr lang="en-US" dirty="0" err="1"/>
@@ -300,7 +299,7 @@
             </a:r>
             <a:r>
               <a:rPr lang="en-US" dirty="0"/>
-              <a:t> IELTS Intelligence — a web platform I built to help independent English language teachers in Myanmar manage the writing assessment workload without removing their professional judgment from the process. Last semester, I gave a poor presentation with poor delivery, so tend to make up better for this one."</a:t>
+              <a:t> IELTS Intelligence — a web platform I built (again) to help independent English language teachers in Myanmar manage the writing assessment workload without removing their professional judgment from the process. Last semester, I gave a poor presentation with poor delivery (and I also got you guys’ feedback from my project proposal), so tend to make up better for this one. Instead of being an LMS system which I originally came up with, I have selected a niche approach that will tackle a specific problem which greatly saves me a lot of time to build this"</a:t>
             </a:r>
           </a:p>
         </p:txBody>
@@ -323,101 +322,6 @@
             <a:fld id="{F7021451-1387-4CA6-816F-3879F97B5CBC}" type="slidenum">
               <a:rPr lang="en-US"/>
               <a:t>1</a:t>
-            </a:fld>
-            <a:endParaRPr lang="en-US"/>
-          </a:p>
-        </p:txBody>
-      </p:sp>
-    </p:spTree>
-    <p:extLst>
-      <p:ext uri="{BB962C8B-B14F-4D97-AF65-F5344CB8AC3E}">
-        <p14:creationId xmlns:p14="http://schemas.microsoft.com/office/powerpoint/2010/main" val="1024086991"/>
-      </p:ext>
-    </p:extLst>
-  </p:cSld>
-  <p:clrMapOvr>
-    <a:masterClrMapping/>
-  </p:clrMapOvr>
-</p:notes>
-</file>
-
-<file path=ppt/notesSlides/notesSlide10.xml><?xml version="1.0" encoding="utf-8"?>
-<p:notes xmlns:a="http://schemas.openxmlformats.org/drawingml/2006/main" xmlns:r="http://schemas.openxmlformats.org/officeDocument/2006/relationships" xmlns:p="http://schemas.openxmlformats.org/presentationml/2006/main">
-  <p:cSld>
-    <p:spTree>
-      <p:nvGrpSpPr>
-        <p:cNvPr id="1" name=""/>
-        <p:cNvGrpSpPr/>
-        <p:nvPr/>
-      </p:nvGrpSpPr>
-      <p:grpSpPr>
-        <a:xfrm>
-          <a:off x="0" y="0"/>
-          <a:ext cx="0" cy="0"/>
-          <a:chOff x="0" y="0"/>
-          <a:chExt cx="0" cy="0"/>
-        </a:xfrm>
-      </p:grpSpPr>
-      <p:sp>
-        <p:nvSpPr>
-          <p:cNvPr id="2" name="Slide Image Placeholder 1"/>
-          <p:cNvSpPr>
-            <a:spLocks noGrp="1" noRot="1" noChangeAspect="1"/>
-          </p:cNvSpPr>
-          <p:nvPr>
-            <p:ph type="sldImg"/>
-          </p:nvPr>
-        </p:nvSpPr>
-        <p:spPr/>
-      </p:sp>
-      <p:sp>
-        <p:nvSpPr>
-          <p:cNvPr id="3" name="Notes Placeholder 2"/>
-          <p:cNvSpPr>
-            <a:spLocks noGrp="1"/>
-          </p:cNvSpPr>
-          <p:nvPr>
-            <p:ph type="body" idx="1"/>
-          </p:nvPr>
-        </p:nvSpPr>
-        <p:spPr/>
-        <p:txBody>
-          <a:bodyPr/>
-          <a:lstStyle/>
-          <a:p>
-            <a:r>
-              <a:rPr lang="en-US" dirty="0"/>
-              <a:t>"To close: </a:t>
-            </a:r>
-            <a:r>
-              <a:rPr lang="en-US" dirty="0" err="1"/>
-              <a:t>SayarDesk</a:t>
-            </a:r>
-            <a:r>
-              <a:rPr lang="en-US" dirty="0"/>
-              <a:t> demonstrates that a hybrid machine learning architecture can provide IELTS writing predictions with meaningful accuracy and, critically, with transparent explanations that teachers can interrogate and correct. But the more important argument is about design philosophy. Educational AI doesn't need to pursue complete automation to be useful. A system that handles the mechanical parts of a workflow — first-pass scoring, error identification, score recording — and returns the teacher's time to the things that require human judgment is a more defensible contribution than one that tries to replace the teacher entirely. That's what this platform is trying to deliver. Thank you."</a:t>
-            </a:r>
-          </a:p>
-        </p:txBody>
-      </p:sp>
-      <p:sp>
-        <p:nvSpPr>
-          <p:cNvPr id="4" name="Slide Number Placeholder 3"/>
-          <p:cNvSpPr>
-            <a:spLocks noGrp="1"/>
-          </p:cNvSpPr>
-          <p:nvPr>
-            <p:ph type="sldNum" sz="quarter" idx="10"/>
-          </p:nvPr>
-        </p:nvSpPr>
-        <p:spPr/>
-        <p:txBody>
-          <a:bodyPr/>
-          <a:lstStyle/>
-          <a:p>
-            <a:fld id="{F7021451-1387-4CA6-816F-3879F97B5CBC}" type="slidenum">
-              <a:rPr lang="en-US"/>
-              <a:t>10</a:t>
             </a:fld>
             <a:endParaRPr lang="en-US"/>
           </a:p>
@@ -482,7 +386,7 @@
           <a:p>
             <a:r>
               <a:rPr lang="en-US" dirty="0"/>
-              <a:t>"Let me start with the problem this platform is responding to. An independent teacher managing thirty students faces a real bottleneck: each IELTS essay requires reading across four separate rubric criteria, recording scores, and writing actionable feedback. Multiply that by a full cohort submitting every two weeks and the administrative load starts crowding out the higher-value teaching work. In Myanmar specifically, there's no institutional scaffolding — no admin staff, no shared marking systems. Add frequent power cuts and mobile-only internet, and a student might simply not receive their feedback before their next practice session."</a:t>
+              <a:t>"Let me start with the problem this platform is responding to which you are already familiar with, same issue different but a niche solution. </a:t>
             </a:r>
           </a:p>
         </p:txBody>
@@ -569,7 +473,7 @@
           <a:p>
             <a:r>
               <a:rPr lang="en-US" dirty="0"/>
-              <a:t>"</a:t>
+              <a:t>“For this brand new </a:t>
             </a:r>
             <a:r>
               <a:rPr lang="en-US" dirty="0" err="1"/>
@@ -577,7 +481,7 @@
             </a:r>
             <a:r>
               <a:rPr lang="en-US" dirty="0"/>
-              <a:t> addresses this through a four-stage workflow. The teacher submits an essay — either as a PDF, DOCX, or pasted text — along with the writing prompt. The prompt is not optional: it feeds the semantic similarity component that evaluates Task Achievement. The backend then runs a three-stage scoring engine, which I'll detail shortly. Crucially, every score comes with a SHAP-derived explanation so the teacher understands </a:t>
+              <a:t> it addresses this through a four-stage workflow. The teacher submits an essay — either as a PDF, DOCX, or pasted text — along with the writing prompt. It feeds the semantic similarity component that evaluates Task Achievement. The backend then runs a three-stage scoring engine, which I'll detail shortly. Every score comes with a SHAP-derived explanation so the teacher understands </a:t>
             </a:r>
             <a:r>
               <a:rPr lang="en-US" i="1" dirty="0"/>
@@ -585,7 +489,7 @@
             </a:r>
             <a:r>
               <a:rPr lang="en-US" dirty="0"/>
-              <a:t> the model scored as it did. And the teacher always has the final word — they can accept, adjust, or override any criterion before the score enters the official record."</a:t>
+              <a:t> the model scored as it did by looking at which specific feature push the model to score in that way . And the teacher always has the final word — they can accept, adjust, or override any criterion before the score enters the official record."</a:t>
             </a:r>
           </a:p>
         </p:txBody>
@@ -672,7 +576,7 @@
           <a:p>
             <a:r>
               <a:rPr lang="en-US" dirty="0"/>
-              <a:t>"The model was trained on 585 essays from two sources. Three hundred were scraped from Writing9, a publicly accessible IELTS repository, covering all three task types. The challenge with authentic student data is that it clusters around intermediate proficiency — bands 5.5 to 7.0 are well represented, but very high and very low bands are scarce. To address this, I generated 285 synthetic essays using Google Gemini, specifically targeting the underrepresented extremes. This gives the model enough examples of genuinely weak and genuinely strong writing to learn their distinctive features, rather than defaulting to near-mean predictions at the tails."</a:t>
+              <a:t>"The model was trained on 585 essays from two sources. Three hundred were scraped from Writing9, a publicly accessible IELTS webpage, covering all three task types. The challenge with authentic student data is that it clusters around intermediate proficiency — bands 5.5 to 7.0 are well represented, but very high and very low bands are scarce. To address this, I generated 285 synthetic essays using Google Gemini, specifically targeting the underrepresented extremes. This gives the model enough examples of genuinely weak and genuinely strong writing to learn their distinctive features, rather than defaulting to near-mean predictions at the tails."</a:t>
             </a:r>
           </a:p>
         </p:txBody>
@@ -763,11 +667,11 @@
             </a:r>
             <a:r>
               <a:rPr lang="en-US" dirty="0" err="1"/>
-              <a:t>XGBoost</a:t>
+              <a:t>LwXGBoost</a:t>
             </a:r>
             <a:r>
               <a:rPr lang="en-US" dirty="0"/>
-              <a:t> with handcrafted linguistic features only. Task Achievement and Coherence reached R² around 0.60, but Grammar scored just 0.29 — handcrafted features can't capture the semantic depth needed for that criterion. The second iteration replaced everything with a </a:t>
+              <a:t> with handcrafted linguistic features only using as reference from one the academic source that I found. Task Achievement and Coherence reached R² around 0.60, but Grammar scored just 0.29 — handcrafted features can't capture the semantic depth needed for that criterion. The second iteration replaced everything with a </a:t>
             </a:r>
             <a:r>
               <a:rPr lang="en-US" dirty="0" err="1"/>
@@ -791,7 +695,7 @@
             </a:r>
             <a:r>
               <a:rPr lang="en-US" dirty="0"/>
-              <a:t> on training data, but garbage at test time. The third iteration corrected the leakage and added an LLM adjudicator as a third signal."</a:t>
+              <a:t> on training data, but garbage at test time. The third iteration although still hasn’t corrected the leakage is showing positive sign on all the assessment, probably Overfitting but there is more in-depth analysis to be dealt with and I also added an LLM adjudicator as a third-party evaluator because, why not???. I personally thought it was a cool addition to add"</a:t>
             </a:r>
           </a:p>
         </p:txBody>
@@ -878,7 +782,26 @@
           <a:p>
             <a:r>
               <a:rPr lang="en-US" dirty="0"/>
-              <a:t>"The current ensemble fuses three signals through criterion-specific weights. For Task Achievement and Coherence — where semantic understanding matters most — the LLM carries more weight. For Lexical Resource and Grammatical Range — where explicit linguistic features like Type-Token Ratio and syntactic dependency counts are more diagnostic — the hybrid model leads. The results are solid: R² between 0.830 and 0.908 across all four criteria, with 83 to 90.7 percent of predictions landing within half a band of the human score. If the LLM API is unavailable, the system falls back gracefully to 100% hybrid scores."</a:t>
+              <a:t>"The current ensemble fuses three signals through criterion-specific weights. For Task Achievement and Coherence — where semantic understanding matters most — the LLM carries more weight. For Lexical Resource and Grammatical Range — where explicit linguistic features like Type-Token Ratio and syntactic dependency counts are more diagnostic — the hybrid model leads. The results are solid: R² between 0.830 and 0.908 across all four criteria, with 83 to 90.7 percent of predictions landing within half a band of the human score. </a:t>
+            </a:r>
+            <a:br>
+              <a:rPr lang="en-US" dirty="0"/>
+            </a:br>
+            <a:endParaRPr lang="en-US" dirty="0"/>
+          </a:p>
+          <a:p>
+            <a:r>
+              <a:rPr lang="en-US" dirty="0"/>
+              <a:t>If you think the results are too good to be true, you are right, there is more to uncover and high chances of being overfitting, but I will come back to that part later.</a:t>
+            </a:r>
+          </a:p>
+          <a:p>
+            <a:br>
+              <a:rPr lang="en-US" dirty="0"/>
+            </a:br>
+            <a:r>
+              <a:rPr lang="en-US" dirty="0"/>
+              <a:t>If the LLM API is unavailable somehow due to failure with the API key or token, instead of having the entire system to crash, it will fall back gracefully to 100% hybrid scores."</a:t>
             </a:r>
           </a:p>
         </p:txBody>
@@ -964,10 +887,6 @@
           <a:lstStyle/>
           <a:p>
             <a:r>
-              <a:rPr lang="en-US" dirty="0"/>
-              <a:t>"Technically, </a:t>
-            </a:r>
-            <a:r>
               <a:rPr lang="en-US" dirty="0" err="1"/>
               <a:t>SayarDesk</a:t>
             </a:r>
@@ -1013,7 +932,24 @@
             </a:r>
             <a:r>
               <a:rPr lang="en-US" dirty="0"/>
-              <a:t> model. The platform is deployed on Azure App Services with geographic redundancy, and the frontend is built for low-bandwidth conditions — Chart.js for interactive charts, CDN-loaded scripts as the only external dependency, and client-side draft saving to prevent data loss during connectivity interruptions."</a:t>
+              <a:t> model. The platform is deployed on either Azure App Services or </a:t>
+            </a:r>
+            <a:r>
+              <a:rPr lang="en-US" dirty="0" err="1"/>
+              <a:t>HuggingFace</a:t>
+            </a:r>
+            <a:r>
+              <a:rPr lang="en-US" dirty="0"/>
+              <a:t> (which is to be decided soon), and the frontend is built for low-bandwidth conditions — Chart.js for interactive charts (which was helped built by Gemini since I don’t know JavaScript yet…), and client-side draft saving to prevent data loss during connectivity interruptions.“</a:t>
+            </a:r>
+          </a:p>
+          <a:p>
+            <a:endParaRPr lang="en-US" dirty="0"/>
+          </a:p>
+          <a:p>
+            <a:r>
+              <a:rPr lang="en-US" dirty="0"/>
+              <a:t>NOW I WILL SHOW YOU THE APP AS A DEMONSTRATION</a:t>
             </a:r>
           </a:p>
         </p:txBody>
@@ -1100,15 +1036,25 @@
           <a:p>
             <a:r>
               <a:rPr lang="en-US" dirty="0"/>
-              <a:t>"Concretely, a teacher logs in to a dashboard showing her class's mean band score, a list of at-risk students flagged below band 6.0, and </a:t>
+              <a:t>"I want to be clear about what this platform is not yet. The corpus of 585 essays is small for a 110M-parameter model, and the band distribution still skews toward the middle despite synthetic augmentation. Not only that, there is a good chance there is a data leakage problem here. Now the “data” is now an issue here, which needs to be deeply search and run analysis thoroughly before next demonstration.</a:t>
+            </a:r>
+            <a:br>
+              <a:rPr lang="en-US" dirty="0"/>
+            </a:br>
+            <a:br>
+              <a:rPr lang="en-US" dirty="0"/>
+            </a:br>
+            <a:r>
+              <a:rPr lang="en-US" dirty="0"/>
+              <a:t> And the current development build doesn't enforce Django authentication, which must be resolved before any public deployment. On the future directions side, the most impactful improvements would be integrating inline error annotation directly in the essay text, expanding the training corpus with established datasets like ASAP-AES, and running a proper longitudinal study to answer the question this thesis can't: do teachers who use </a:t>
             </a:r>
             <a:r>
               <a:rPr lang="en-US" dirty="0" err="1"/>
-              <a:t>colour</a:t>
+              <a:t>SayarDesk</a:t>
             </a:r>
             <a:r>
               <a:rPr lang="en-US" dirty="0"/>
-              <a:t>-coded recent submissions. She submits a new essay — dragging and dropping a PDF or pasting text — waits roughly 30 to 45 seconds for scoring to complete, then sees a radar chart of the four criteria alongside SHAP explanations identifying the most significant issues. If she disagrees with a score, she adjusts it and saves. Over a full twelve-week preparation course, the platform accumulates longitudinal data: a student whose Lexical Resource score hasn't moved across six submissions despite targeted feedback is a very different instructional problem from one whose scores are improving steadily. That distinction is hard to see without the data laid out explicitly."</a:t>
+              <a:t> actually feel less burdened, and do their students perform better on official exams?"</a:t>
             </a:r>
           </a:p>
         </p:txBody>
@@ -1195,7 +1141,7 @@
           <a:p>
             <a:r>
               <a:rPr lang="en-US" dirty="0"/>
-              <a:t>"I want to be clear about what this platform is not yet. The corpus of 585 essays is small for a 110M-parameter model, and the band distribution still skews toward the middle despite synthetic augmentation. The synchronous inference call blocks the HTTP request for up to 60 seconds — a Celery task queue would fix this. And the current development build doesn't enforce Django authentication, which must be resolved before any public deployment. On the future directions side, the most impactful improvements would be integrating inline error annotation directly in the essay text, expanding the training corpus with established datasets like ASAP-AES, and running a proper longitudinal study to answer the question this thesis can't: do teachers who use </a:t>
+              <a:t>"To close: </a:t>
             </a:r>
             <a:r>
               <a:rPr lang="en-US" dirty="0" err="1"/>
@@ -1203,7 +1149,7 @@
             </a:r>
             <a:r>
               <a:rPr lang="en-US" dirty="0"/>
-              <a:t> actually feel less burdened, and do their students perform better on official exams?"</a:t>
+              <a:t> demonstrates that a hybrid machine learning architecture can provide IELTS writing predictions with meaningful accuracy and, critically, with transparent explanations that teachers can interrogate and correct. But the more important argument is about design philosophy. Educational AI doesn't need to pursue complete automation to be useful. A system that handles the mechanical parts of a workflow — first-pass scoring, error identification, score recording — and returns the teacher's time to the things that require human judgment is a more defensible contribution than one that tries to replace the teacher entirely. That's what this platform is trying to deliver. Thank you."</a:t>
             </a:r>
           </a:p>
         </p:txBody>
@@ -1787,276 +1733,6 @@
 </p:sld>
 </file>
 
-<file path=ppt/slides/slide10.xml><?xml version="1.0" encoding="utf-8"?>
-<p:sld xmlns:a="http://schemas.openxmlformats.org/drawingml/2006/main" xmlns:r="http://schemas.openxmlformats.org/officeDocument/2006/relationships" xmlns:p="http://schemas.openxmlformats.org/presentationml/2006/main">
-  <p:cSld name="Slide 10">
-    <p:bg>
-      <p:bgPr>
-        <a:solidFill>
-          <a:srgbClr val="1A1A2E"/>
-        </a:solidFill>
-        <a:effectLst/>
-      </p:bgPr>
-    </p:bg>
-    <p:spTree>
-      <p:nvGrpSpPr>
-        <p:cNvPr id="1" name=""/>
-        <p:cNvGrpSpPr/>
-        <p:nvPr/>
-      </p:nvGrpSpPr>
-      <p:grpSpPr>
-        <a:xfrm>
-          <a:off x="0" y="0"/>
-          <a:ext cx="0" cy="0"/>
-          <a:chOff x="0" y="0"/>
-          <a:chExt cx="0" cy="0"/>
-        </a:xfrm>
-      </p:grpSpPr>
-      <p:sp>
-        <p:nvSpPr>
-          <p:cNvPr id="2" name="Shape 0"/>
-          <p:cNvSpPr/>
-          <p:nvPr/>
-        </p:nvSpPr>
-        <p:spPr>
-          <a:xfrm>
-            <a:off x="502920" y="914400"/>
-            <a:ext cx="54864" cy="3017520"/>
-          </a:xfrm>
-          <a:prstGeom prst="rect">
-            <a:avLst/>
-          </a:prstGeom>
-          <a:solidFill>
-            <a:srgbClr val="4A90D9"/>
-          </a:solidFill>
-          <a:ln w="12700">
-            <a:solidFill>
-              <a:srgbClr val="4A90D9"/>
-            </a:solidFill>
-            <a:prstDash val="solid"/>
-          </a:ln>
-        </p:spPr>
-      </p:sp>
-      <p:sp>
-        <p:nvSpPr>
-          <p:cNvPr id="3" name="Text 1"/>
-          <p:cNvSpPr/>
-          <p:nvPr/>
-        </p:nvSpPr>
-        <p:spPr>
-          <a:xfrm>
-            <a:off x="685800" y="868680"/>
-            <a:ext cx="7772400" cy="548640"/>
-          </a:xfrm>
-          <a:prstGeom prst="rect">
-            <a:avLst/>
-          </a:prstGeom>
-          <a:noFill/>
-          <a:ln/>
-        </p:spPr>
-        <p:txBody>
-          <a:bodyPr wrap="square" lIns="0" tIns="0" rIns="0" bIns="0" rtlCol="0" anchor="ctr"/>
-          <a:lstStyle/>
-          <a:p>
-            <a:pPr marL="0" indent="0">
-              <a:buNone/>
-            </a:pPr>
-            <a:r>
-              <a:rPr lang="en-US" sz="3200" b="1" dirty="0">
-                <a:solidFill>
-                  <a:srgbClr val="FFFFFF"/>
-                </a:solidFill>
-                <a:latin typeface="Georgia" pitchFamily="34" charset="0"/>
-                <a:ea typeface="Georgia" pitchFamily="34" charset="-122"/>
-                <a:cs typeface="Georgia" pitchFamily="34" charset="-120"/>
-              </a:rPr>
-              <a:t>Conclusion</a:t>
-            </a:r>
-            <a:endParaRPr lang="en-US" sz="3200" dirty="0"/>
-          </a:p>
-        </p:txBody>
-      </p:sp>
-      <p:sp>
-        <p:nvSpPr>
-          <p:cNvPr id="4" name="Text 2"/>
-          <p:cNvSpPr/>
-          <p:nvPr/>
-        </p:nvSpPr>
-        <p:spPr>
-          <a:xfrm>
-            <a:off x="685800" y="1463040"/>
-            <a:ext cx="8046720" cy="3200400"/>
-          </a:xfrm>
-          <a:prstGeom prst="rect">
-            <a:avLst/>
-          </a:prstGeom>
-          <a:noFill/>
-          <a:ln/>
-        </p:spPr>
-        <p:txBody>
-          <a:bodyPr wrap="square" lIns="0" tIns="0" rIns="0" bIns="0" rtlCol="0" anchor="ctr"/>
-          <a:lstStyle/>
-          <a:p>
-            <a:pPr marL="0" indent="0">
-              <a:lnSpc>
-                <a:spcPct val="150000"/>
-              </a:lnSpc>
-              <a:buNone/>
-            </a:pPr>
-            <a:r>
-              <a:rPr lang="en-US" sz="1200" b="1" dirty="0">
-                <a:solidFill>
-                  <a:srgbClr val="4A90D9"/>
-                </a:solidFill>
-                <a:latin typeface="Calibri" pitchFamily="34" charset="0"/>
-                <a:ea typeface="Calibri" pitchFamily="34" charset="-122"/>
-                <a:cs typeface="Calibri" pitchFamily="34" charset="-120"/>
-              </a:rPr>
-              <a:t>1  </a:t>
-            </a:r>
-            <a:r>
-              <a:rPr lang="en-US" sz="1200" dirty="0">
-                <a:solidFill>
-                  <a:srgbClr val="D0D8E4"/>
-                </a:solidFill>
-                <a:latin typeface="Calibri" pitchFamily="34" charset="0"/>
-                <a:ea typeface="Calibri" pitchFamily="34" charset="-122"/>
-                <a:cs typeface="Calibri" pitchFamily="34" charset="-120"/>
-              </a:rPr>
-              <a:t>R² 0.830–0.908 across all four IELTS criteria; 83–90.7% of predictions within ±0.5 band
-</a:t>
-            </a:r>
-            <a:r>
-              <a:rPr lang="en-US" sz="1200" b="1" dirty="0">
-                <a:solidFill>
-                  <a:srgbClr val="4A90D9"/>
-                </a:solidFill>
-                <a:latin typeface="Calibri" pitchFamily="34" charset="0"/>
-                <a:ea typeface="Calibri" pitchFamily="34" charset="-122"/>
-                <a:cs typeface="Calibri" pitchFamily="34" charset="-120"/>
-              </a:rPr>
-              <a:t>2  </a:t>
-            </a:r>
-            <a:r>
-              <a:rPr lang="en-US" sz="1200" dirty="0">
-                <a:solidFill>
-                  <a:srgbClr val="D0D8E4"/>
-                </a:solidFill>
-                <a:latin typeface="Calibri" pitchFamily="34" charset="0"/>
-                <a:ea typeface="Calibri" pitchFamily="34" charset="-122"/>
-                <a:cs typeface="Calibri" pitchFamily="34" charset="-120"/>
-              </a:rPr>
-              <a:t>Human-in-the-loop design: AI scores are advisory — teacher-validated scores enter the official record
-</a:t>
-            </a:r>
-            <a:r>
-              <a:rPr lang="en-US" sz="1200" b="1" dirty="0">
-                <a:solidFill>
-                  <a:srgbClr val="4A90D9"/>
-                </a:solidFill>
-                <a:latin typeface="Calibri" pitchFamily="34" charset="0"/>
-                <a:ea typeface="Calibri" pitchFamily="34" charset="-122"/>
-                <a:cs typeface="Calibri" pitchFamily="34" charset="-120"/>
-              </a:rPr>
-              <a:t>3  </a:t>
-            </a:r>
-            <a:r>
-              <a:rPr lang="en-US" sz="1200" dirty="0">
-                <a:solidFill>
-                  <a:srgbClr val="D0D8E4"/>
-                </a:solidFill>
-                <a:latin typeface="Calibri" pitchFamily="34" charset="0"/>
-                <a:ea typeface="Calibri" pitchFamily="34" charset="-122"/>
-                <a:cs typeface="Calibri" pitchFamily="34" charset="-120"/>
-              </a:rPr>
-              <a:t>SHAP explanations make the model's reasoning transparent and interrogable
-</a:t>
-            </a:r>
-            <a:r>
-              <a:rPr lang="en-US" sz="1200" b="1" dirty="0">
-                <a:solidFill>
-                  <a:srgbClr val="4A90D9"/>
-                </a:solidFill>
-                <a:latin typeface="Calibri" pitchFamily="34" charset="0"/>
-                <a:ea typeface="Calibri" pitchFamily="34" charset="-122"/>
-                <a:cs typeface="Calibri" pitchFamily="34" charset="-120"/>
-              </a:rPr>
-              <a:t>4  </a:t>
-            </a:r>
-            <a:r>
-              <a:rPr lang="en-US" sz="1200" dirty="0">
-                <a:solidFill>
-                  <a:srgbClr val="D0D8E4"/>
-                </a:solidFill>
-                <a:latin typeface="Calibri" pitchFamily="34" charset="0"/>
-                <a:ea typeface="Calibri" pitchFamily="34" charset="-122"/>
-                <a:cs typeface="Calibri" pitchFamily="34" charset="-120"/>
-              </a:rPr>
-              <a:t>Contextual design: cloud redundancy, progressive enhancement, and dual essay input address Myanmar's infrastructure realities
-</a:t>
-            </a:r>
-            <a:r>
-              <a:rPr lang="en-US" sz="1200" b="1" dirty="0">
-                <a:solidFill>
-                  <a:srgbClr val="4A90D9"/>
-                </a:solidFill>
-                <a:latin typeface="Calibri" pitchFamily="34" charset="0"/>
-                <a:ea typeface="Calibri" pitchFamily="34" charset="-122"/>
-                <a:cs typeface="Calibri" pitchFamily="34" charset="-120"/>
-              </a:rPr>
-              <a:t>5  </a:t>
-            </a:r>
-            <a:r>
-              <a:rPr lang="en-US" sz="1200" dirty="0">
-                <a:solidFill>
-                  <a:srgbClr val="D0D8E4"/>
-                </a:solidFill>
-                <a:latin typeface="Calibri" pitchFamily="34" charset="0"/>
-                <a:ea typeface="Calibri" pitchFamily="34" charset="-122"/>
-                <a:cs typeface="Calibri" pitchFamily="34" charset="-120"/>
-              </a:rPr>
-              <a:t>Augmentation, not automation — teachers gain time for judgment-based work that machines cannot yet replicate</a:t>
-            </a:r>
-            <a:endParaRPr lang="en-US" sz="1200" dirty="0"/>
-          </a:p>
-        </p:txBody>
-      </p:sp>
-      <p:sp>
-        <p:nvSpPr>
-          <p:cNvPr id="5" name="Text 3"/>
-          <p:cNvSpPr/>
-          <p:nvPr/>
-        </p:nvSpPr>
-        <p:spPr>
-          <a:xfrm>
-            <a:off x="685800" y="4709160"/>
-            <a:ext cx="7772400" cy="274320"/>
-          </a:xfrm>
-          <a:prstGeom prst="rect">
-            <a:avLst/>
-          </a:prstGeom>
-          <a:noFill/>
-          <a:ln/>
-        </p:spPr>
-        <p:txBody>
-          <a:bodyPr wrap="square" lIns="0" tIns="0" rIns="0" bIns="0" rtlCol="0" anchor="ctr"/>
-          <a:lstStyle/>
-          <a:p>
-            <a:pPr marL="0" indent="0">
-              <a:buNone/>
-            </a:pPr>
-            <a:endParaRPr lang="en-US" sz="1000" dirty="0"/>
-          </a:p>
-        </p:txBody>
-      </p:sp>
-    </p:spTree>
-  </p:cSld>
-  <p:clrMapOvr>
-    <a:masterClrMapping/>
-  </p:clrMapOvr>
-</p:sld>
-</file>
-
 <file path=ppt/slides/slide2.xml><?xml version="1.0" encoding="utf-8"?>
 <p:sld xmlns:a="http://schemas.openxmlformats.org/drawingml/2006/main" xmlns:r="http://schemas.openxmlformats.org/officeDocument/2006/relationships" xmlns:p="http://schemas.openxmlformats.org/presentationml/2006/main">
   <p:cSld name="Slide 2">
@@ -3023,7 +2699,7 @@
         </p:nvSpPr>
         <p:spPr>
           <a:xfrm>
-            <a:off x="4700016" y="868680"/>
+            <a:off x="4700016" y="989592"/>
             <a:ext cx="1783080" cy="411480"/>
           </a:xfrm>
           <a:prstGeom prst="rect">
@@ -3048,7 +2724,28 @@
                 <a:ea typeface="Georgia" pitchFamily="34" charset="-122"/>
                 <a:cs typeface="Georgia" pitchFamily="34" charset="-120"/>
               </a:rPr>
-              <a:t>3  SHAP Explanations</a:t>
+              <a:t>3  SHAP (Shapley Addictive Explanation)</a:t>
+            </a:r>
+            <a:br>
+              <a:rPr lang="en-US" sz="1100" b="1" dirty="0">
+                <a:solidFill>
+                  <a:srgbClr val="4A90D9"/>
+                </a:solidFill>
+                <a:latin typeface="Georgia" pitchFamily="34" charset="0"/>
+                <a:ea typeface="Georgia" pitchFamily="34" charset="-122"/>
+                <a:cs typeface="Georgia" pitchFamily="34" charset="-120"/>
+              </a:rPr>
+            </a:br>
+            <a:r>
+              <a:rPr lang="en-US" sz="1100" b="1" dirty="0">
+                <a:solidFill>
+                  <a:srgbClr val="4A90D9"/>
+                </a:solidFill>
+                <a:latin typeface="Georgia" pitchFamily="34" charset="0"/>
+                <a:ea typeface="Georgia" pitchFamily="34" charset="-122"/>
+                <a:cs typeface="Georgia" pitchFamily="34" charset="-120"/>
+              </a:rPr>
+              <a:t>Explanations</a:t>
             </a:r>
             <a:endParaRPr lang="en-US" sz="1100" dirty="0"/>
           </a:p>
@@ -5257,7 +4954,7 @@
                 <a:ea typeface="Calibri" pitchFamily="34" charset="-122"/>
                 <a:cs typeface="Calibri" pitchFamily="34" charset="-120"/>
               </a:rPr>
-              <a:t>Production</a:t>
+              <a:t>Almost Production…</a:t>
             </a:r>
             <a:endParaRPr lang="en-US" sz="1100" dirty="0"/>
           </a:p>
@@ -5438,7 +5135,7 @@
                 <a:ea typeface="Calibri" pitchFamily="34" charset="-122"/>
                 <a:cs typeface="Calibri" pitchFamily="34" charset="-120"/>
               </a:rPr>
-              <a:t>Corrected leakage. BERT+XGBoost hybrid + Qwen3-VL-8B LLM adjudicator with criterion-specific weights.</a:t>
+              <a:t>Corrected leakage (?). BERT+XGBoost hybrid + Qwen3-VL-8B LLM adjudicator with criterion-specific weights.</a:t>
             </a:r>
             <a:endParaRPr lang="en-US" sz="1100" dirty="0"/>
           </a:p>
@@ -8528,913 +8225,6 @@
 
 <file path=ppt/slides/slide8.xml><?xml version="1.0" encoding="utf-8"?>
 <p:sld xmlns:a="http://schemas.openxmlformats.org/drawingml/2006/main" xmlns:r="http://schemas.openxmlformats.org/officeDocument/2006/relationships" xmlns:p="http://schemas.openxmlformats.org/presentationml/2006/main">
-  <p:cSld name="Slide 8">
-    <p:bg>
-      <p:bgPr>
-        <a:solidFill>
-          <a:srgbClr val="FFFFFF"/>
-        </a:solidFill>
-        <a:effectLst/>
-      </p:bgPr>
-    </p:bg>
-    <p:spTree>
-      <p:nvGrpSpPr>
-        <p:cNvPr id="1" name=""/>
-        <p:cNvGrpSpPr/>
-        <p:nvPr/>
-      </p:nvGrpSpPr>
-      <p:grpSpPr>
-        <a:xfrm>
-          <a:off x="0" y="0"/>
-          <a:ext cx="0" cy="0"/>
-          <a:chOff x="0" y="0"/>
-          <a:chExt cx="0" cy="0"/>
-        </a:xfrm>
-      </p:grpSpPr>
-      <p:sp>
-        <p:nvSpPr>
-          <p:cNvPr id="2" name="Shape 0"/>
-          <p:cNvSpPr/>
-          <p:nvPr/>
-        </p:nvSpPr>
-        <p:spPr>
-          <a:xfrm>
-            <a:off x="0" y="0"/>
-            <a:ext cx="9144000" cy="640080"/>
-          </a:xfrm>
-          <a:prstGeom prst="rect">
-            <a:avLst/>
-          </a:prstGeom>
-          <a:solidFill>
-            <a:srgbClr val="1A1A2E"/>
-          </a:solidFill>
-          <a:ln w="12700">
-            <a:solidFill>
-              <a:srgbClr val="1A1A2E"/>
-            </a:solidFill>
-            <a:prstDash val="solid"/>
-          </a:ln>
-        </p:spPr>
-      </p:sp>
-      <p:sp>
-        <p:nvSpPr>
-          <p:cNvPr id="3" name="Text 1"/>
-          <p:cNvSpPr/>
-          <p:nvPr/>
-        </p:nvSpPr>
-        <p:spPr>
-          <a:xfrm>
-            <a:off x="457200" y="0"/>
-            <a:ext cx="8229600" cy="640080"/>
-          </a:xfrm>
-          <a:prstGeom prst="rect">
-            <a:avLst/>
-          </a:prstGeom>
-          <a:noFill/>
-          <a:ln/>
-        </p:spPr>
-        <p:txBody>
-          <a:bodyPr wrap="square" lIns="0" tIns="0" rIns="0" bIns="0" rtlCol="0" anchor="ctr"/>
-          <a:lstStyle/>
-          <a:p>
-            <a:pPr marL="0" indent="0">
-              <a:buNone/>
-            </a:pPr>
-            <a:r>
-              <a:rPr lang="en-US" sz="2000" b="1" dirty="0">
-                <a:solidFill>
-                  <a:srgbClr val="FFFFFF"/>
-                </a:solidFill>
-                <a:latin typeface="Georgia" pitchFamily="34" charset="0"/>
-                <a:ea typeface="Georgia" pitchFamily="34" charset="-122"/>
-                <a:cs typeface="Georgia" pitchFamily="34" charset="-120"/>
-              </a:rPr>
-              <a:t>Platform in Practice</a:t>
-            </a:r>
-            <a:endParaRPr lang="en-US" sz="2000" dirty="0"/>
-          </a:p>
-        </p:txBody>
-      </p:sp>
-      <p:sp>
-        <p:nvSpPr>
-          <p:cNvPr id="4" name="Shape 2"/>
-          <p:cNvSpPr/>
-          <p:nvPr/>
-        </p:nvSpPr>
-        <p:spPr>
-          <a:xfrm>
-            <a:off x="320040" y="850392"/>
-            <a:ext cx="411480" cy="411480"/>
-          </a:xfrm>
-          <a:prstGeom prst="ellipse">
-            <a:avLst/>
-          </a:prstGeom>
-          <a:solidFill>
-            <a:srgbClr val="4A90D9"/>
-          </a:solidFill>
-          <a:ln w="12700">
-            <a:solidFill>
-              <a:srgbClr val="4A90D9"/>
-            </a:solidFill>
-            <a:prstDash val="solid"/>
-          </a:ln>
-        </p:spPr>
-      </p:sp>
-      <p:sp>
-        <p:nvSpPr>
-          <p:cNvPr id="5" name="Text 3"/>
-          <p:cNvSpPr/>
-          <p:nvPr/>
-        </p:nvSpPr>
-        <p:spPr>
-          <a:xfrm>
-            <a:off x="320040" y="850392"/>
-            <a:ext cx="411480" cy="411480"/>
-          </a:xfrm>
-          <a:prstGeom prst="rect">
-            <a:avLst/>
-          </a:prstGeom>
-          <a:noFill/>
-          <a:ln/>
-        </p:spPr>
-        <p:txBody>
-          <a:bodyPr wrap="square" lIns="0" tIns="0" rIns="0" bIns="0" rtlCol="0" anchor="ctr"/>
-          <a:lstStyle/>
-          <a:p>
-            <a:pPr marL="0" indent="0" algn="ctr">
-              <a:buNone/>
-            </a:pPr>
-            <a:r>
-              <a:rPr lang="en-US" sz="1300" b="1" dirty="0">
-                <a:solidFill>
-                  <a:srgbClr val="FFFFFF"/>
-                </a:solidFill>
-                <a:latin typeface="Georgia" pitchFamily="34" charset="0"/>
-                <a:ea typeface="Georgia" pitchFamily="34" charset="-122"/>
-                <a:cs typeface="Georgia" pitchFamily="34" charset="-120"/>
-              </a:rPr>
-              <a:t>1</a:t>
-            </a:r>
-            <a:endParaRPr lang="en-US" sz="1300" dirty="0"/>
-          </a:p>
-        </p:txBody>
-      </p:sp>
-      <p:sp>
-        <p:nvSpPr>
-          <p:cNvPr id="6" name="Text 4"/>
-          <p:cNvSpPr/>
-          <p:nvPr/>
-        </p:nvSpPr>
-        <p:spPr>
-          <a:xfrm>
-            <a:off x="841248" y="850392"/>
-            <a:ext cx="1828800" cy="411480"/>
-          </a:xfrm>
-          <a:prstGeom prst="rect">
-            <a:avLst/>
-          </a:prstGeom>
-          <a:noFill/>
-          <a:ln/>
-        </p:spPr>
-        <p:txBody>
-          <a:bodyPr wrap="square" lIns="0" tIns="0" rIns="0" bIns="0" rtlCol="0" anchor="ctr"/>
-          <a:lstStyle/>
-          <a:p>
-            <a:pPr marL="0" indent="0">
-              <a:buNone/>
-            </a:pPr>
-            <a:r>
-              <a:rPr lang="en-US" sz="1300" b="1" dirty="0">
-                <a:solidFill>
-                  <a:srgbClr val="1A1A2E"/>
-                </a:solidFill>
-                <a:latin typeface="Georgia" pitchFamily="34" charset="0"/>
-                <a:ea typeface="Georgia" pitchFamily="34" charset="-122"/>
-                <a:cs typeface="Georgia" pitchFamily="34" charset="-120"/>
-              </a:rPr>
-              <a:t>Dashboard</a:t>
-            </a:r>
-            <a:endParaRPr lang="en-US" sz="1300" dirty="0"/>
-          </a:p>
-        </p:txBody>
-      </p:sp>
-      <p:sp>
-        <p:nvSpPr>
-          <p:cNvPr id="7" name="Text 5"/>
-          <p:cNvSpPr/>
-          <p:nvPr/>
-        </p:nvSpPr>
-        <p:spPr>
-          <a:xfrm>
-            <a:off x="2697480" y="850392"/>
-            <a:ext cx="6126480" cy="548640"/>
-          </a:xfrm>
-          <a:prstGeom prst="rect">
-            <a:avLst/>
-          </a:prstGeom>
-          <a:noFill/>
-          <a:ln/>
-        </p:spPr>
-        <p:txBody>
-          <a:bodyPr wrap="square" lIns="0" tIns="0" rIns="0" bIns="0" rtlCol="0" anchor="ctr"/>
-          <a:lstStyle/>
-          <a:p>
-            <a:pPr marL="0" indent="0">
-              <a:buNone/>
-            </a:pPr>
-            <a:r>
-              <a:rPr lang="en-US" sz="1100" dirty="0">
-                <a:solidFill>
-                  <a:srgbClr val="36454F"/>
-                </a:solidFill>
-                <a:latin typeface="Calibri" pitchFamily="34" charset="0"/>
-                <a:ea typeface="Calibri" pitchFamily="34" charset="-122"/>
-                <a:cs typeface="Calibri" pitchFamily="34" charset="-120"/>
-              </a:rPr>
-              <a:t>Class Mastery score, at-risk students flagged below band 6.0, colour-coded recent submissions.</a:t>
-            </a:r>
-            <a:endParaRPr lang="en-US" sz="1100" dirty="0"/>
-          </a:p>
-        </p:txBody>
-      </p:sp>
-      <p:sp>
-        <p:nvSpPr>
-          <p:cNvPr id="8" name="Shape 6"/>
-          <p:cNvSpPr/>
-          <p:nvPr/>
-        </p:nvSpPr>
-        <p:spPr>
-          <a:xfrm>
-            <a:off x="320040" y="1435608"/>
-            <a:ext cx="8503920" cy="9144"/>
-          </a:xfrm>
-          <a:prstGeom prst="rect">
-            <a:avLst/>
-          </a:prstGeom>
-          <a:solidFill>
-            <a:srgbClr val="D8DEE4"/>
-          </a:solidFill>
-          <a:ln w="12700">
-            <a:solidFill>
-              <a:srgbClr val="D8DEE4"/>
-            </a:solidFill>
-            <a:prstDash val="solid"/>
-          </a:ln>
-        </p:spPr>
-      </p:sp>
-      <p:sp>
-        <p:nvSpPr>
-          <p:cNvPr id="9" name="Shape 7"/>
-          <p:cNvSpPr/>
-          <p:nvPr/>
-        </p:nvSpPr>
-        <p:spPr>
-          <a:xfrm>
-            <a:off x="320040" y="1645920"/>
-            <a:ext cx="411480" cy="411480"/>
-          </a:xfrm>
-          <a:prstGeom prst="ellipse">
-            <a:avLst/>
-          </a:prstGeom>
-          <a:solidFill>
-            <a:srgbClr val="4A90D9"/>
-          </a:solidFill>
-          <a:ln w="12700">
-            <a:solidFill>
-              <a:srgbClr val="4A90D9"/>
-            </a:solidFill>
-            <a:prstDash val="solid"/>
-          </a:ln>
-        </p:spPr>
-      </p:sp>
-      <p:sp>
-        <p:nvSpPr>
-          <p:cNvPr id="10" name="Text 8"/>
-          <p:cNvSpPr/>
-          <p:nvPr/>
-        </p:nvSpPr>
-        <p:spPr>
-          <a:xfrm>
-            <a:off x="320040" y="1645920"/>
-            <a:ext cx="411480" cy="411480"/>
-          </a:xfrm>
-          <a:prstGeom prst="rect">
-            <a:avLst/>
-          </a:prstGeom>
-          <a:noFill/>
-          <a:ln/>
-        </p:spPr>
-        <p:txBody>
-          <a:bodyPr wrap="square" lIns="0" tIns="0" rIns="0" bIns="0" rtlCol="0" anchor="ctr"/>
-          <a:lstStyle/>
-          <a:p>
-            <a:pPr marL="0" indent="0" algn="ctr">
-              <a:buNone/>
-            </a:pPr>
-            <a:r>
-              <a:rPr lang="en-US" sz="1300" b="1" dirty="0">
-                <a:solidFill>
-                  <a:srgbClr val="FFFFFF"/>
-                </a:solidFill>
-                <a:latin typeface="Georgia" pitchFamily="34" charset="0"/>
-                <a:ea typeface="Georgia" pitchFamily="34" charset="-122"/>
-                <a:cs typeface="Georgia" pitchFamily="34" charset="-120"/>
-              </a:rPr>
-              <a:t>2</a:t>
-            </a:r>
-            <a:endParaRPr lang="en-US" sz="1300" dirty="0"/>
-          </a:p>
-        </p:txBody>
-      </p:sp>
-      <p:sp>
-        <p:nvSpPr>
-          <p:cNvPr id="11" name="Text 9"/>
-          <p:cNvSpPr/>
-          <p:nvPr/>
-        </p:nvSpPr>
-        <p:spPr>
-          <a:xfrm>
-            <a:off x="841248" y="1645920"/>
-            <a:ext cx="1828800" cy="411480"/>
-          </a:xfrm>
-          <a:prstGeom prst="rect">
-            <a:avLst/>
-          </a:prstGeom>
-          <a:noFill/>
-          <a:ln/>
-        </p:spPr>
-        <p:txBody>
-          <a:bodyPr wrap="square" lIns="0" tIns="0" rIns="0" bIns="0" rtlCol="0" anchor="ctr"/>
-          <a:lstStyle/>
-          <a:p>
-            <a:pPr marL="0" indent="0">
-              <a:buNone/>
-            </a:pPr>
-            <a:r>
-              <a:rPr lang="en-US" sz="1300" b="1" dirty="0">
-                <a:solidFill>
-                  <a:srgbClr val="1A1A2E"/>
-                </a:solidFill>
-                <a:latin typeface="Georgia" pitchFamily="34" charset="0"/>
-                <a:ea typeface="Georgia" pitchFamily="34" charset="-122"/>
-                <a:cs typeface="Georgia" pitchFamily="34" charset="-120"/>
-              </a:rPr>
-              <a:t>Submit Essay</a:t>
-            </a:r>
-            <a:endParaRPr lang="en-US" sz="1300" dirty="0"/>
-          </a:p>
-        </p:txBody>
-      </p:sp>
-      <p:sp>
-        <p:nvSpPr>
-          <p:cNvPr id="12" name="Text 10"/>
-          <p:cNvSpPr/>
-          <p:nvPr/>
-        </p:nvSpPr>
-        <p:spPr>
-          <a:xfrm>
-            <a:off x="2697480" y="1645920"/>
-            <a:ext cx="6126480" cy="548640"/>
-          </a:xfrm>
-          <a:prstGeom prst="rect">
-            <a:avLst/>
-          </a:prstGeom>
-          <a:noFill/>
-          <a:ln/>
-        </p:spPr>
-        <p:txBody>
-          <a:bodyPr wrap="square" lIns="0" tIns="0" rIns="0" bIns="0" rtlCol="0" anchor="ctr"/>
-          <a:lstStyle/>
-          <a:p>
-            <a:pPr marL="0" indent="0">
-              <a:buNone/>
-            </a:pPr>
-            <a:r>
-              <a:rPr lang="en-US" sz="1100" dirty="0">
-                <a:solidFill>
-                  <a:srgbClr val="36454F"/>
-                </a:solidFill>
-                <a:latin typeface="Calibri" pitchFamily="34" charset="0"/>
-                <a:ea typeface="Calibri" pitchFamily="34" charset="-122"/>
-                <a:cs typeface="Calibri" pitchFamily="34" charset="-120"/>
-              </a:rPr>
-              <a:t>Drag-and-drop PDF/DOCX or paste text. Prompt is required for Task Achievement. Auto-saves draft every 30 s.</a:t>
-            </a:r>
-            <a:endParaRPr lang="en-US" sz="1100" dirty="0"/>
-          </a:p>
-        </p:txBody>
-      </p:sp>
-      <p:sp>
-        <p:nvSpPr>
-          <p:cNvPr id="13" name="Shape 11"/>
-          <p:cNvSpPr/>
-          <p:nvPr/>
-        </p:nvSpPr>
-        <p:spPr>
-          <a:xfrm>
-            <a:off x="320040" y="2231136"/>
-            <a:ext cx="8503920" cy="9144"/>
-          </a:xfrm>
-          <a:prstGeom prst="rect">
-            <a:avLst/>
-          </a:prstGeom>
-          <a:solidFill>
-            <a:srgbClr val="D8DEE4"/>
-          </a:solidFill>
-          <a:ln w="12700">
-            <a:solidFill>
-              <a:srgbClr val="D8DEE4"/>
-            </a:solidFill>
-            <a:prstDash val="solid"/>
-          </a:ln>
-        </p:spPr>
-      </p:sp>
-      <p:sp>
-        <p:nvSpPr>
-          <p:cNvPr id="14" name="Shape 12"/>
-          <p:cNvSpPr/>
-          <p:nvPr/>
-        </p:nvSpPr>
-        <p:spPr>
-          <a:xfrm>
-            <a:off x="320040" y="2441448"/>
-            <a:ext cx="411480" cy="411480"/>
-          </a:xfrm>
-          <a:prstGeom prst="ellipse">
-            <a:avLst/>
-          </a:prstGeom>
-          <a:solidFill>
-            <a:srgbClr val="4A90D9"/>
-          </a:solidFill>
-          <a:ln w="12700">
-            <a:solidFill>
-              <a:srgbClr val="4A90D9"/>
-            </a:solidFill>
-            <a:prstDash val="solid"/>
-          </a:ln>
-        </p:spPr>
-      </p:sp>
-      <p:sp>
-        <p:nvSpPr>
-          <p:cNvPr id="15" name="Text 13"/>
-          <p:cNvSpPr/>
-          <p:nvPr/>
-        </p:nvSpPr>
-        <p:spPr>
-          <a:xfrm>
-            <a:off x="320040" y="2441448"/>
-            <a:ext cx="411480" cy="411480"/>
-          </a:xfrm>
-          <a:prstGeom prst="rect">
-            <a:avLst/>
-          </a:prstGeom>
-          <a:noFill/>
-          <a:ln/>
-        </p:spPr>
-        <p:txBody>
-          <a:bodyPr wrap="square" lIns="0" tIns="0" rIns="0" bIns="0" rtlCol="0" anchor="ctr"/>
-          <a:lstStyle/>
-          <a:p>
-            <a:pPr marL="0" indent="0" algn="ctr">
-              <a:buNone/>
-            </a:pPr>
-            <a:r>
-              <a:rPr lang="en-US" sz="1300" b="1" dirty="0">
-                <a:solidFill>
-                  <a:srgbClr val="FFFFFF"/>
-                </a:solidFill>
-                <a:latin typeface="Georgia" pitchFamily="34" charset="0"/>
-                <a:ea typeface="Georgia" pitchFamily="34" charset="-122"/>
-                <a:cs typeface="Georgia" pitchFamily="34" charset="-120"/>
-              </a:rPr>
-              <a:t>3</a:t>
-            </a:r>
-            <a:endParaRPr lang="en-US" sz="1300" dirty="0"/>
-          </a:p>
-        </p:txBody>
-      </p:sp>
-      <p:sp>
-        <p:nvSpPr>
-          <p:cNvPr id="16" name="Text 14"/>
-          <p:cNvSpPr/>
-          <p:nvPr/>
-        </p:nvSpPr>
-        <p:spPr>
-          <a:xfrm>
-            <a:off x="841248" y="2441448"/>
-            <a:ext cx="1828800" cy="411480"/>
-          </a:xfrm>
-          <a:prstGeom prst="rect">
-            <a:avLst/>
-          </a:prstGeom>
-          <a:noFill/>
-          <a:ln/>
-        </p:spPr>
-        <p:txBody>
-          <a:bodyPr wrap="square" lIns="0" tIns="0" rIns="0" bIns="0" rtlCol="0" anchor="ctr"/>
-          <a:lstStyle/>
-          <a:p>
-            <a:pPr marL="0" indent="0">
-              <a:buNone/>
-            </a:pPr>
-            <a:r>
-              <a:rPr lang="en-US" sz="1300" b="1" dirty="0">
-                <a:solidFill>
-                  <a:srgbClr val="1A1A2E"/>
-                </a:solidFill>
-                <a:latin typeface="Georgia" pitchFamily="34" charset="0"/>
-                <a:ea typeface="Georgia" pitchFamily="34" charset="-122"/>
-                <a:cs typeface="Georgia" pitchFamily="34" charset="-120"/>
-              </a:rPr>
-              <a:t>Review Results</a:t>
-            </a:r>
-            <a:endParaRPr lang="en-US" sz="1300" dirty="0"/>
-          </a:p>
-        </p:txBody>
-      </p:sp>
-      <p:sp>
-        <p:nvSpPr>
-          <p:cNvPr id="17" name="Text 15"/>
-          <p:cNvSpPr/>
-          <p:nvPr/>
-        </p:nvSpPr>
-        <p:spPr>
-          <a:xfrm>
-            <a:off x="2697480" y="2441448"/>
-            <a:ext cx="6126480" cy="548640"/>
-          </a:xfrm>
-          <a:prstGeom prst="rect">
-            <a:avLst/>
-          </a:prstGeom>
-          <a:noFill/>
-          <a:ln/>
-        </p:spPr>
-        <p:txBody>
-          <a:bodyPr wrap="square" lIns="0" tIns="0" rIns="0" bIns="0" rtlCol="0" anchor="ctr"/>
-          <a:lstStyle/>
-          <a:p>
-            <a:pPr marL="0" indent="0">
-              <a:buNone/>
-            </a:pPr>
-            <a:r>
-              <a:rPr lang="en-US" sz="1100" dirty="0">
-                <a:solidFill>
-                  <a:srgbClr val="36454F"/>
-                </a:solidFill>
-                <a:latin typeface="Calibri" pitchFamily="34" charset="0"/>
-                <a:ea typeface="Calibri" pitchFamily="34" charset="-122"/>
-                <a:cs typeface="Calibri" pitchFamily="34" charset="-120"/>
-              </a:rPr>
-              <a:t>Radar chart of 4 criteria, SHAP-derived explanations per criterion, 30–45 s processing time.</a:t>
-            </a:r>
-            <a:endParaRPr lang="en-US" sz="1100" dirty="0"/>
-          </a:p>
-        </p:txBody>
-      </p:sp>
-      <p:sp>
-        <p:nvSpPr>
-          <p:cNvPr id="18" name="Shape 16"/>
-          <p:cNvSpPr/>
-          <p:nvPr/>
-        </p:nvSpPr>
-        <p:spPr>
-          <a:xfrm>
-            <a:off x="320040" y="3026664"/>
-            <a:ext cx="8503920" cy="9144"/>
-          </a:xfrm>
-          <a:prstGeom prst="rect">
-            <a:avLst/>
-          </a:prstGeom>
-          <a:solidFill>
-            <a:srgbClr val="D8DEE4"/>
-          </a:solidFill>
-          <a:ln w="12700">
-            <a:solidFill>
-              <a:srgbClr val="D8DEE4"/>
-            </a:solidFill>
-            <a:prstDash val="solid"/>
-          </a:ln>
-        </p:spPr>
-      </p:sp>
-      <p:sp>
-        <p:nvSpPr>
-          <p:cNvPr id="19" name="Shape 17"/>
-          <p:cNvSpPr/>
-          <p:nvPr/>
-        </p:nvSpPr>
-        <p:spPr>
-          <a:xfrm>
-            <a:off x="320040" y="3236976"/>
-            <a:ext cx="411480" cy="411480"/>
-          </a:xfrm>
-          <a:prstGeom prst="ellipse">
-            <a:avLst/>
-          </a:prstGeom>
-          <a:solidFill>
-            <a:srgbClr val="4A90D9"/>
-          </a:solidFill>
-          <a:ln w="12700">
-            <a:solidFill>
-              <a:srgbClr val="4A90D9"/>
-            </a:solidFill>
-            <a:prstDash val="solid"/>
-          </a:ln>
-        </p:spPr>
-      </p:sp>
-      <p:sp>
-        <p:nvSpPr>
-          <p:cNvPr id="20" name="Text 18"/>
-          <p:cNvSpPr/>
-          <p:nvPr/>
-        </p:nvSpPr>
-        <p:spPr>
-          <a:xfrm>
-            <a:off x="320040" y="3236976"/>
-            <a:ext cx="411480" cy="411480"/>
-          </a:xfrm>
-          <a:prstGeom prst="rect">
-            <a:avLst/>
-          </a:prstGeom>
-          <a:noFill/>
-          <a:ln/>
-        </p:spPr>
-        <p:txBody>
-          <a:bodyPr wrap="square" lIns="0" tIns="0" rIns="0" bIns="0" rtlCol="0" anchor="ctr"/>
-          <a:lstStyle/>
-          <a:p>
-            <a:pPr marL="0" indent="0" algn="ctr">
-              <a:buNone/>
-            </a:pPr>
-            <a:r>
-              <a:rPr lang="en-US" sz="1300" b="1" dirty="0">
-                <a:solidFill>
-                  <a:srgbClr val="FFFFFF"/>
-                </a:solidFill>
-                <a:latin typeface="Georgia" pitchFamily="34" charset="0"/>
-                <a:ea typeface="Georgia" pitchFamily="34" charset="-122"/>
-                <a:cs typeface="Georgia" pitchFamily="34" charset="-120"/>
-              </a:rPr>
-              <a:t>4</a:t>
-            </a:r>
-            <a:endParaRPr lang="en-US" sz="1300" dirty="0"/>
-          </a:p>
-        </p:txBody>
-      </p:sp>
-      <p:sp>
-        <p:nvSpPr>
-          <p:cNvPr id="21" name="Text 19"/>
-          <p:cNvSpPr/>
-          <p:nvPr/>
-        </p:nvSpPr>
-        <p:spPr>
-          <a:xfrm>
-            <a:off x="841248" y="3236976"/>
-            <a:ext cx="1828800" cy="411480"/>
-          </a:xfrm>
-          <a:prstGeom prst="rect">
-            <a:avLst/>
-          </a:prstGeom>
-          <a:noFill/>
-          <a:ln/>
-        </p:spPr>
-        <p:txBody>
-          <a:bodyPr wrap="square" lIns="0" tIns="0" rIns="0" bIns="0" rtlCol="0" anchor="ctr"/>
-          <a:lstStyle/>
-          <a:p>
-            <a:pPr marL="0" indent="0">
-              <a:buNone/>
-            </a:pPr>
-            <a:r>
-              <a:rPr lang="en-US" sz="1300" b="1" dirty="0">
-                <a:solidFill>
-                  <a:srgbClr val="1A1A2E"/>
-                </a:solidFill>
-                <a:latin typeface="Georgia" pitchFamily="34" charset="0"/>
-                <a:ea typeface="Georgia" pitchFamily="34" charset="-122"/>
-                <a:cs typeface="Georgia" pitchFamily="34" charset="-120"/>
-              </a:rPr>
-              <a:t>Override</a:t>
-            </a:r>
-            <a:endParaRPr lang="en-US" sz="1300" dirty="0"/>
-          </a:p>
-        </p:txBody>
-      </p:sp>
-      <p:sp>
-        <p:nvSpPr>
-          <p:cNvPr id="22" name="Text 20"/>
-          <p:cNvSpPr/>
-          <p:nvPr/>
-        </p:nvSpPr>
-        <p:spPr>
-          <a:xfrm>
-            <a:off x="2697480" y="3236976"/>
-            <a:ext cx="6126480" cy="548640"/>
-          </a:xfrm>
-          <a:prstGeom prst="rect">
-            <a:avLst/>
-          </a:prstGeom>
-          <a:noFill/>
-          <a:ln/>
-        </p:spPr>
-        <p:txBody>
-          <a:bodyPr wrap="square" lIns="0" tIns="0" rIns="0" bIns="0" rtlCol="0" anchor="ctr"/>
-          <a:lstStyle/>
-          <a:p>
-            <a:pPr marL="0" indent="0">
-              <a:buNone/>
-            </a:pPr>
-            <a:r>
-              <a:rPr lang="en-US" sz="1100" dirty="0">
-                <a:solidFill>
-                  <a:srgbClr val="36454F"/>
-                </a:solidFill>
-                <a:latin typeface="Calibri" pitchFamily="34" charset="0"/>
-                <a:ea typeface="Calibri" pitchFamily="34" charset="-122"/>
-                <a:cs typeface="Calibri" pitchFamily="34" charset="-120"/>
-              </a:rPr>
-              <a:t>Teacher adjusts any criterion score. Both AI prediction and validated score stored in Evaluations table.</a:t>
-            </a:r>
-            <a:endParaRPr lang="en-US" sz="1100" dirty="0"/>
-          </a:p>
-        </p:txBody>
-      </p:sp>
-      <p:sp>
-        <p:nvSpPr>
-          <p:cNvPr id="23" name="Shape 21"/>
-          <p:cNvSpPr/>
-          <p:nvPr/>
-        </p:nvSpPr>
-        <p:spPr>
-          <a:xfrm>
-            <a:off x="320040" y="3822192"/>
-            <a:ext cx="8503920" cy="9144"/>
-          </a:xfrm>
-          <a:prstGeom prst="rect">
-            <a:avLst/>
-          </a:prstGeom>
-          <a:solidFill>
-            <a:srgbClr val="D8DEE4"/>
-          </a:solidFill>
-          <a:ln w="12700">
-            <a:solidFill>
-              <a:srgbClr val="D8DEE4"/>
-            </a:solidFill>
-            <a:prstDash val="solid"/>
-          </a:ln>
-        </p:spPr>
-      </p:sp>
-      <p:sp>
-        <p:nvSpPr>
-          <p:cNvPr id="24" name="Shape 22"/>
-          <p:cNvSpPr/>
-          <p:nvPr/>
-        </p:nvSpPr>
-        <p:spPr>
-          <a:xfrm>
-            <a:off x="320040" y="4032504"/>
-            <a:ext cx="411480" cy="411480"/>
-          </a:xfrm>
-          <a:prstGeom prst="ellipse">
-            <a:avLst/>
-          </a:prstGeom>
-          <a:solidFill>
-            <a:srgbClr val="4A90D9"/>
-          </a:solidFill>
-          <a:ln w="12700">
-            <a:solidFill>
-              <a:srgbClr val="4A90D9"/>
-            </a:solidFill>
-            <a:prstDash val="solid"/>
-          </a:ln>
-        </p:spPr>
-      </p:sp>
-      <p:sp>
-        <p:nvSpPr>
-          <p:cNvPr id="25" name="Text 23"/>
-          <p:cNvSpPr/>
-          <p:nvPr/>
-        </p:nvSpPr>
-        <p:spPr>
-          <a:xfrm>
-            <a:off x="320040" y="4032504"/>
-            <a:ext cx="411480" cy="411480"/>
-          </a:xfrm>
-          <a:prstGeom prst="rect">
-            <a:avLst/>
-          </a:prstGeom>
-          <a:noFill/>
-          <a:ln/>
-        </p:spPr>
-        <p:txBody>
-          <a:bodyPr wrap="square" lIns="0" tIns="0" rIns="0" bIns="0" rtlCol="0" anchor="ctr"/>
-          <a:lstStyle/>
-          <a:p>
-            <a:pPr marL="0" indent="0" algn="ctr">
-              <a:buNone/>
-            </a:pPr>
-            <a:r>
-              <a:rPr lang="en-US" sz="1300" b="1" dirty="0">
-                <a:solidFill>
-                  <a:srgbClr val="FFFFFF"/>
-                </a:solidFill>
-                <a:latin typeface="Georgia" pitchFamily="34" charset="0"/>
-                <a:ea typeface="Georgia" pitchFamily="34" charset="-122"/>
-                <a:cs typeface="Georgia" pitchFamily="34" charset="-120"/>
-              </a:rPr>
-              <a:t>5</a:t>
-            </a:r>
-            <a:endParaRPr lang="en-US" sz="1300" dirty="0"/>
-          </a:p>
-        </p:txBody>
-      </p:sp>
-      <p:sp>
-        <p:nvSpPr>
-          <p:cNvPr id="26" name="Text 24"/>
-          <p:cNvSpPr/>
-          <p:nvPr/>
-        </p:nvSpPr>
-        <p:spPr>
-          <a:xfrm>
-            <a:off x="841248" y="4032504"/>
-            <a:ext cx="1828800" cy="411480"/>
-          </a:xfrm>
-          <a:prstGeom prst="rect">
-            <a:avLst/>
-          </a:prstGeom>
-          <a:noFill/>
-          <a:ln/>
-        </p:spPr>
-        <p:txBody>
-          <a:bodyPr wrap="square" lIns="0" tIns="0" rIns="0" bIns="0" rtlCol="0" anchor="ctr"/>
-          <a:lstStyle/>
-          <a:p>
-            <a:pPr marL="0" indent="0">
-              <a:buNone/>
-            </a:pPr>
-            <a:r>
-              <a:rPr lang="en-US" sz="1300" b="1" dirty="0">
-                <a:solidFill>
-                  <a:srgbClr val="1A1A2E"/>
-                </a:solidFill>
-                <a:latin typeface="Georgia" pitchFamily="34" charset="0"/>
-                <a:ea typeface="Georgia" pitchFamily="34" charset="-122"/>
-                <a:cs typeface="Georgia" pitchFamily="34" charset="-120"/>
-              </a:rPr>
-              <a:t>Track Progress</a:t>
-            </a:r>
-            <a:endParaRPr lang="en-US" sz="1300" dirty="0"/>
-          </a:p>
-        </p:txBody>
-      </p:sp>
-      <p:sp>
-        <p:nvSpPr>
-          <p:cNvPr id="27" name="Text 25"/>
-          <p:cNvSpPr/>
-          <p:nvPr/>
-        </p:nvSpPr>
-        <p:spPr>
-          <a:xfrm>
-            <a:off x="2697480" y="4032504"/>
-            <a:ext cx="6126480" cy="548640"/>
-          </a:xfrm>
-          <a:prstGeom prst="rect">
-            <a:avLst/>
-          </a:prstGeom>
-          <a:noFill/>
-          <a:ln/>
-        </p:spPr>
-        <p:txBody>
-          <a:bodyPr wrap="square" lIns="0" tIns="0" rIns="0" bIns="0" rtlCol="0" anchor="ctr"/>
-          <a:lstStyle/>
-          <a:p>
-            <a:pPr marL="0" indent="0">
-              <a:buNone/>
-            </a:pPr>
-            <a:r>
-              <a:rPr lang="en-US" sz="1100" dirty="0">
-                <a:solidFill>
-                  <a:srgbClr val="36454F"/>
-                </a:solidFill>
-                <a:latin typeface="Calibri" pitchFamily="34" charset="0"/>
-                <a:ea typeface="Calibri" pitchFamily="34" charset="-122"/>
-                <a:cs typeface="Calibri" pitchFamily="34" charset="-120"/>
-              </a:rPr>
-              <a:t>Longitudinal line chart per student. Flat Lexical Resource across 6 submissions = distinct instructional problem.</a:t>
-            </a:r>
-            <a:endParaRPr lang="en-US" sz="1100" dirty="0"/>
-          </a:p>
-        </p:txBody>
-      </p:sp>
-    </p:spTree>
-  </p:cSld>
-  <p:clrMapOvr>
-    <a:masterClrMapping/>
-  </p:clrMapOvr>
-</p:sld>
-</file>
-
-<file path=ppt/slides/slide9.xml><?xml version="1.0" encoding="utf-8"?>
-<p:sld xmlns:a="http://schemas.openxmlformats.org/drawingml/2006/main" xmlns:r="http://schemas.openxmlformats.org/officeDocument/2006/relationships" xmlns:p="http://schemas.openxmlformats.org/presentationml/2006/main">
   <p:cSld name="Slide 9">
     <p:bg>
       <p:bgPr>
@@ -9611,7 +8401,7 @@
               <a:buChar char="•"/>
             </a:pPr>
             <a:r>
-              <a:rPr lang="en-US" sz="1100" dirty="0">
+              <a:rPr lang="en-US" sz="1100" dirty="0" err="1">
                 <a:solidFill>
                   <a:srgbClr val="36454F"/>
                 </a:solidFill>
@@ -9619,7 +8409,18 @@
                 <a:ea typeface="Calibri" pitchFamily="34" charset="-122"/>
                 <a:cs typeface="Calibri" pitchFamily="34" charset="-120"/>
               </a:rPr>
-              <a:t>Synchronous inference blocks HTTP request 20–60 s (Celery queue planned)</a:t>
+              <a:t>HuggingFace</a:t>
+            </a:r>
+            <a:r>
+              <a:rPr lang="en-US" sz="1100" dirty="0">
+                <a:solidFill>
+                  <a:srgbClr val="36454F"/>
+                </a:solidFill>
+                <a:latin typeface="Calibri" pitchFamily="34" charset="0"/>
+                <a:ea typeface="Calibri" pitchFamily="34" charset="-122"/>
+                <a:cs typeface="Calibri" pitchFamily="34" charset="-120"/>
+              </a:rPr>
+              <a:t> API key currently hardcoded — must be env var before public deploy</a:t>
             </a:r>
             <a:endParaRPr lang="en-US" sz="1100" dirty="0"/>
           </a:p>
@@ -9640,7 +8441,7 @@
                 <a:ea typeface="Calibri" pitchFamily="34" charset="-122"/>
                 <a:cs typeface="Calibri" pitchFamily="34" charset="-120"/>
               </a:rPr>
-              <a:t>HuggingFace API key partially hardcoded — must be env var before public deploy</a:t>
+              <a:t>Django auth not enforced in current dev build</a:t>
             </a:r>
             <a:endParaRPr lang="en-US" sz="1100" dirty="0"/>
           </a:p>
@@ -9661,10 +8462,77 @@
                 <a:ea typeface="Calibri" pitchFamily="34" charset="-122"/>
                 <a:cs typeface="Calibri" pitchFamily="34" charset="-120"/>
               </a:rPr>
-              <a:t>Django auth not enforced in current dev build</a:t>
+              <a:t>Myanmar first-language transfer patterns may be underrepresented</a:t>
             </a:r>
             <a:endParaRPr lang="en-US" sz="1100" dirty="0"/>
           </a:p>
+          <a:p>
+            <a:pPr marL="0" indent="0">
+              <a:buNone/>
+            </a:pPr>
+            <a:endParaRPr lang="en-US" sz="1100" dirty="0"/>
+          </a:p>
+        </p:txBody>
+      </p:sp>
+      <p:sp>
+        <p:nvSpPr>
+          <p:cNvPr id="6" name="Text 4"/>
+          <p:cNvSpPr/>
+          <p:nvPr/>
+        </p:nvSpPr>
+        <p:spPr>
+          <a:xfrm>
+            <a:off x="4754880" y="777240"/>
+            <a:ext cx="4023360" cy="347472"/>
+          </a:xfrm>
+          <a:prstGeom prst="rect">
+            <a:avLst/>
+          </a:prstGeom>
+          <a:noFill/>
+          <a:ln/>
+        </p:spPr>
+        <p:txBody>
+          <a:bodyPr wrap="square" lIns="0" tIns="0" rIns="0" bIns="0" rtlCol="0" anchor="ctr"/>
+          <a:lstStyle/>
+          <a:p>
+            <a:pPr marL="0" indent="0">
+              <a:buNone/>
+            </a:pPr>
+            <a:r>
+              <a:rPr lang="en-US" sz="1300" b="1" dirty="0">
+                <a:solidFill>
+                  <a:srgbClr val="1A1A2E"/>
+                </a:solidFill>
+                <a:latin typeface="Georgia" pitchFamily="34" charset="0"/>
+                <a:ea typeface="Georgia" pitchFamily="34" charset="-122"/>
+                <a:cs typeface="Georgia" pitchFamily="34" charset="-120"/>
+              </a:rPr>
+              <a:t>Planned Improvements</a:t>
+            </a:r>
+            <a:endParaRPr lang="en-US" sz="1300" dirty="0"/>
+          </a:p>
+        </p:txBody>
+      </p:sp>
+      <p:sp>
+        <p:nvSpPr>
+          <p:cNvPr id="7" name="Text 5"/>
+          <p:cNvSpPr/>
+          <p:nvPr/>
+        </p:nvSpPr>
+        <p:spPr>
+          <a:xfrm>
+            <a:off x="4754880" y="1170432"/>
+            <a:ext cx="4023360" cy="3291840"/>
+          </a:xfrm>
+          <a:prstGeom prst="rect">
+            <a:avLst/>
+          </a:prstGeom>
+          <a:noFill/>
+          <a:ln/>
+        </p:spPr>
+        <p:txBody>
+          <a:bodyPr wrap="square" lIns="0" tIns="0" rIns="0" bIns="0" rtlCol="0" anchor="ctr"/>
+          <a:lstStyle/>
           <a:p>
             <a:pPr marL="342900" indent="-342900">
               <a:spcAft>
@@ -9682,77 +8550,9 @@
                 <a:ea typeface="Calibri" pitchFamily="34" charset="-122"/>
                 <a:cs typeface="Calibri" pitchFamily="34" charset="-120"/>
               </a:rPr>
-              <a:t>Myanmar first-language transfer patterns may be underrepresented</a:t>
-            </a:r>
-            <a:endParaRPr lang="en-US" sz="1100" dirty="0"/>
-          </a:p>
-          <a:p>
-            <a:pPr marL="0" indent="0">
-              <a:buNone/>
-            </a:pPr>
-            <a:endParaRPr lang="en-US" sz="1100" dirty="0"/>
-          </a:p>
-        </p:txBody>
-      </p:sp>
-      <p:sp>
-        <p:nvSpPr>
-          <p:cNvPr id="6" name="Text 4"/>
-          <p:cNvSpPr/>
-          <p:nvPr/>
-        </p:nvSpPr>
-        <p:spPr>
-          <a:xfrm>
-            <a:off x="4754880" y="777240"/>
-            <a:ext cx="4023360" cy="347472"/>
-          </a:xfrm>
-          <a:prstGeom prst="rect">
-            <a:avLst/>
-          </a:prstGeom>
-          <a:noFill/>
-          <a:ln/>
-        </p:spPr>
-        <p:txBody>
-          <a:bodyPr wrap="square" lIns="0" tIns="0" rIns="0" bIns="0" rtlCol="0" anchor="ctr"/>
-          <a:lstStyle/>
-          <a:p>
-            <a:pPr marL="0" indent="0">
-              <a:buNone/>
-            </a:pPr>
-            <a:r>
-              <a:rPr lang="en-US" sz="1300" b="1" dirty="0">
-                <a:solidFill>
-                  <a:srgbClr val="1A1A2E"/>
-                </a:solidFill>
-                <a:latin typeface="Georgia" pitchFamily="34" charset="0"/>
-                <a:ea typeface="Georgia" pitchFamily="34" charset="-122"/>
-                <a:cs typeface="Georgia" pitchFamily="34" charset="-120"/>
-              </a:rPr>
-              <a:t>Planned Improvements</a:t>
-            </a:r>
-            <a:endParaRPr lang="en-US" sz="1300" dirty="0"/>
-          </a:p>
-        </p:txBody>
-      </p:sp>
-      <p:sp>
-        <p:nvSpPr>
-          <p:cNvPr id="7" name="Text 5"/>
-          <p:cNvSpPr/>
-          <p:nvPr/>
-        </p:nvSpPr>
-        <p:spPr>
-          <a:xfrm>
-            <a:off x="4754880" y="1170432"/>
-            <a:ext cx="4023360" cy="3291840"/>
-          </a:xfrm>
-          <a:prstGeom prst="rect">
-            <a:avLst/>
-          </a:prstGeom>
-          <a:noFill/>
-          <a:ln/>
-        </p:spPr>
-        <p:txBody>
-          <a:bodyPr wrap="square" lIns="0" tIns="0" rIns="0" bIns="0" rtlCol="0" anchor="ctr"/>
-          <a:lstStyle/>
+              <a:t>Cambridge IELTS or ASAP-AES corpus expansion</a:t>
+            </a:r>
+          </a:p>
           <a:p>
             <a:pPr marL="342900" indent="-342900">
               <a:spcAft>
@@ -9770,9 +8570,8 @@
                 <a:ea typeface="Calibri" pitchFamily="34" charset="-122"/>
                 <a:cs typeface="Calibri" pitchFamily="34" charset="-120"/>
               </a:rPr>
-              <a:t>LanguageTool / span-classification for inline error annotation</a:t>
-            </a:r>
-            <a:endParaRPr lang="en-US" sz="1100" dirty="0"/>
+              <a:t>In-depth Analysis of the Dataset</a:t>
+            </a:r>
           </a:p>
           <a:p>
             <a:pPr marL="342900" indent="-342900">
@@ -9791,9 +8590,8 @@
                 <a:ea typeface="Calibri" pitchFamily="34" charset="-122"/>
                 <a:cs typeface="Calibri" pitchFamily="34" charset="-120"/>
               </a:rPr>
-              <a:t>Celery + Redis async inference queue</a:t>
-            </a:r>
-            <a:endParaRPr lang="en-US" sz="1100" dirty="0"/>
+              <a:t>Experimenting different ML algorithms for optimal results and performance</a:t>
+            </a:r>
           </a:p>
           <a:p>
             <a:pPr marL="342900" indent="-342900">
@@ -9812,9 +8610,30 @@
                 <a:ea typeface="Calibri" pitchFamily="34" charset="-122"/>
                 <a:cs typeface="Calibri" pitchFamily="34" charset="-120"/>
               </a:rPr>
-              <a:t>LoRA / quantized transformer to reduce compute requirements</a:t>
-            </a:r>
-            <a:endParaRPr lang="en-US" sz="1100" dirty="0"/>
+              <a:t>Deploy on either </a:t>
+            </a:r>
+            <a:r>
+              <a:rPr lang="en-US" sz="1100" dirty="0" err="1">
+                <a:solidFill>
+                  <a:srgbClr val="36454F"/>
+                </a:solidFill>
+                <a:latin typeface="Calibri" pitchFamily="34" charset="0"/>
+                <a:ea typeface="Calibri" pitchFamily="34" charset="-122"/>
+                <a:cs typeface="Calibri" pitchFamily="34" charset="-120"/>
+              </a:rPr>
+              <a:t>HuggingFace</a:t>
+            </a:r>
+            <a:r>
+              <a:rPr lang="en-US" sz="1100" dirty="0">
+                <a:solidFill>
+                  <a:srgbClr val="36454F"/>
+                </a:solidFill>
+                <a:latin typeface="Calibri" pitchFamily="34" charset="0"/>
+                <a:ea typeface="Calibri" pitchFamily="34" charset="-122"/>
+                <a:cs typeface="Calibri" pitchFamily="34" charset="-120"/>
+              </a:rPr>
+              <a:t> or Azure </a:t>
+            </a:r>
           </a:p>
           <a:p>
             <a:pPr marL="342900" indent="-342900">
@@ -9833,70 +8652,7 @@
                 <a:ea typeface="Calibri" pitchFamily="34" charset="-122"/>
                 <a:cs typeface="Calibri" pitchFamily="34" charset="-120"/>
               </a:rPr>
-              <a:t>Cambridge IELTS or ASAP-AES corpus expansion</a:t>
-            </a:r>
-          </a:p>
-          <a:p>
-            <a:pPr marL="342900" indent="-342900">
-              <a:spcAft>
-                <a:spcPts val="400"/>
-              </a:spcAft>
-              <a:buSzPct val="100000"/>
-              <a:buChar char="•"/>
-            </a:pPr>
-            <a:r>
-              <a:rPr lang="en-US" sz="1100" dirty="0">
-                <a:solidFill>
-                  <a:srgbClr val="36454F"/>
-                </a:solidFill>
-                <a:latin typeface="Calibri" pitchFamily="34" charset="0"/>
-                <a:ea typeface="Calibri" pitchFamily="34" charset="-122"/>
-                <a:cs typeface="Calibri" pitchFamily="34" charset="-120"/>
-              </a:rPr>
-              <a:t>Deploy on </a:t>
-            </a:r>
-            <a:r>
-              <a:rPr lang="en-US" sz="1100" dirty="0" err="1">
-                <a:solidFill>
-                  <a:srgbClr val="36454F"/>
-                </a:solidFill>
-                <a:latin typeface="Calibri" pitchFamily="34" charset="0"/>
-                <a:ea typeface="Calibri" pitchFamily="34" charset="-122"/>
-                <a:cs typeface="Calibri" pitchFamily="34" charset="-120"/>
-              </a:rPr>
-              <a:t>HuggingFace</a:t>
-            </a:r>
-            <a:r>
-              <a:rPr lang="en-US" sz="1100" dirty="0">
-                <a:solidFill>
-                  <a:srgbClr val="36454F"/>
-                </a:solidFill>
-                <a:latin typeface="Calibri" pitchFamily="34" charset="0"/>
-                <a:ea typeface="Calibri" pitchFamily="34" charset="-122"/>
-                <a:cs typeface="Calibri" pitchFamily="34" charset="-120"/>
-              </a:rPr>
-              <a:t> for the Prototype</a:t>
-            </a:r>
-            <a:endParaRPr lang="en-US" sz="1100" dirty="0"/>
-          </a:p>
-          <a:p>
-            <a:pPr marL="342900" indent="-342900">
-              <a:spcAft>
-                <a:spcPts val="400"/>
-              </a:spcAft>
-              <a:buSzPct val="100000"/>
-              <a:buChar char="•"/>
-            </a:pPr>
-            <a:r>
-              <a:rPr lang="en-US" sz="1100" dirty="0">
-                <a:solidFill>
-                  <a:srgbClr val="36454F"/>
-                </a:solidFill>
-                <a:latin typeface="Calibri" pitchFamily="34" charset="0"/>
-                <a:ea typeface="Calibri" pitchFamily="34" charset="-122"/>
-                <a:cs typeface="Calibri" pitchFamily="34" charset="-120"/>
-              </a:rPr>
-              <a:t>Longitudinal study: teacher adoption &amp; student exam outcomes</a:t>
+              <a:t>Longitudinal study: teacher adoption &amp; student exam outcomes after production deployment</a:t>
             </a:r>
             <a:endParaRPr lang="en-US" sz="1100" dirty="0"/>
           </a:p>
@@ -9932,6 +8688,276 @@
             <a:prstDash val="solid"/>
           </a:ln>
         </p:spPr>
+      </p:sp>
+    </p:spTree>
+  </p:cSld>
+  <p:clrMapOvr>
+    <a:masterClrMapping/>
+  </p:clrMapOvr>
+</p:sld>
+</file>
+
+<file path=ppt/slides/slide9.xml><?xml version="1.0" encoding="utf-8"?>
+<p:sld xmlns:a="http://schemas.openxmlformats.org/drawingml/2006/main" xmlns:r="http://schemas.openxmlformats.org/officeDocument/2006/relationships" xmlns:p="http://schemas.openxmlformats.org/presentationml/2006/main">
+  <p:cSld name="Slide 10">
+    <p:bg>
+      <p:bgPr>
+        <a:solidFill>
+          <a:srgbClr val="1A1A2E"/>
+        </a:solidFill>
+        <a:effectLst/>
+      </p:bgPr>
+    </p:bg>
+    <p:spTree>
+      <p:nvGrpSpPr>
+        <p:cNvPr id="1" name=""/>
+        <p:cNvGrpSpPr/>
+        <p:nvPr/>
+      </p:nvGrpSpPr>
+      <p:grpSpPr>
+        <a:xfrm>
+          <a:off x="0" y="0"/>
+          <a:ext cx="0" cy="0"/>
+          <a:chOff x="0" y="0"/>
+          <a:chExt cx="0" cy="0"/>
+        </a:xfrm>
+      </p:grpSpPr>
+      <p:sp>
+        <p:nvSpPr>
+          <p:cNvPr id="2" name="Shape 0"/>
+          <p:cNvSpPr/>
+          <p:nvPr/>
+        </p:nvSpPr>
+        <p:spPr>
+          <a:xfrm>
+            <a:off x="502920" y="914400"/>
+            <a:ext cx="54864" cy="3017520"/>
+          </a:xfrm>
+          <a:prstGeom prst="rect">
+            <a:avLst/>
+          </a:prstGeom>
+          <a:solidFill>
+            <a:srgbClr val="4A90D9"/>
+          </a:solidFill>
+          <a:ln w="12700">
+            <a:solidFill>
+              <a:srgbClr val="4A90D9"/>
+            </a:solidFill>
+            <a:prstDash val="solid"/>
+          </a:ln>
+        </p:spPr>
+      </p:sp>
+      <p:sp>
+        <p:nvSpPr>
+          <p:cNvPr id="3" name="Text 1"/>
+          <p:cNvSpPr/>
+          <p:nvPr/>
+        </p:nvSpPr>
+        <p:spPr>
+          <a:xfrm>
+            <a:off x="685800" y="868680"/>
+            <a:ext cx="7772400" cy="548640"/>
+          </a:xfrm>
+          <a:prstGeom prst="rect">
+            <a:avLst/>
+          </a:prstGeom>
+          <a:noFill/>
+          <a:ln/>
+        </p:spPr>
+        <p:txBody>
+          <a:bodyPr wrap="square" lIns="0" tIns="0" rIns="0" bIns="0" rtlCol="0" anchor="ctr"/>
+          <a:lstStyle/>
+          <a:p>
+            <a:pPr marL="0" indent="0">
+              <a:buNone/>
+            </a:pPr>
+            <a:r>
+              <a:rPr lang="en-US" sz="3200" b="1" dirty="0">
+                <a:solidFill>
+                  <a:srgbClr val="FFFFFF"/>
+                </a:solidFill>
+                <a:latin typeface="Georgia" pitchFamily="34" charset="0"/>
+                <a:ea typeface="Georgia" pitchFamily="34" charset="-122"/>
+                <a:cs typeface="Georgia" pitchFamily="34" charset="-120"/>
+              </a:rPr>
+              <a:t>Conclusion</a:t>
+            </a:r>
+            <a:endParaRPr lang="en-US" sz="3200" dirty="0"/>
+          </a:p>
+        </p:txBody>
+      </p:sp>
+      <p:sp>
+        <p:nvSpPr>
+          <p:cNvPr id="4" name="Text 2"/>
+          <p:cNvSpPr/>
+          <p:nvPr/>
+        </p:nvSpPr>
+        <p:spPr>
+          <a:xfrm>
+            <a:off x="685800" y="1463040"/>
+            <a:ext cx="8046720" cy="3200400"/>
+          </a:xfrm>
+          <a:prstGeom prst="rect">
+            <a:avLst/>
+          </a:prstGeom>
+          <a:noFill/>
+          <a:ln/>
+        </p:spPr>
+        <p:txBody>
+          <a:bodyPr wrap="square" lIns="0" tIns="0" rIns="0" bIns="0" rtlCol="0" anchor="ctr"/>
+          <a:lstStyle/>
+          <a:p>
+            <a:pPr marL="0" indent="0">
+              <a:lnSpc>
+                <a:spcPct val="150000"/>
+              </a:lnSpc>
+              <a:buNone/>
+            </a:pPr>
+            <a:r>
+              <a:rPr lang="en-US" sz="1200" b="1" dirty="0">
+                <a:solidFill>
+                  <a:srgbClr val="4A90D9"/>
+                </a:solidFill>
+                <a:latin typeface="Calibri" pitchFamily="34" charset="0"/>
+                <a:ea typeface="Calibri" pitchFamily="34" charset="-122"/>
+                <a:cs typeface="Calibri" pitchFamily="34" charset="-120"/>
+              </a:rPr>
+              <a:t>1  </a:t>
+            </a:r>
+            <a:r>
+              <a:rPr lang="en-US" sz="1200" dirty="0">
+                <a:solidFill>
+                  <a:srgbClr val="D0D8E4"/>
+                </a:solidFill>
+                <a:latin typeface="Calibri" pitchFamily="34" charset="0"/>
+                <a:ea typeface="Calibri" pitchFamily="34" charset="-122"/>
+                <a:cs typeface="Calibri" pitchFamily="34" charset="-120"/>
+              </a:rPr>
+              <a:t>R² 0.830–0.908 across all four IELTS criteria; 83–90.7% of predictions within ±0.5 band
+</a:t>
+            </a:r>
+            <a:r>
+              <a:rPr lang="en-US" sz="1200" b="1" dirty="0">
+                <a:solidFill>
+                  <a:srgbClr val="4A90D9"/>
+                </a:solidFill>
+                <a:latin typeface="Calibri" pitchFamily="34" charset="0"/>
+                <a:ea typeface="Calibri" pitchFamily="34" charset="-122"/>
+                <a:cs typeface="Calibri" pitchFamily="34" charset="-120"/>
+              </a:rPr>
+              <a:t>2  </a:t>
+            </a:r>
+            <a:r>
+              <a:rPr lang="en-US" sz="1200" dirty="0">
+                <a:solidFill>
+                  <a:srgbClr val="D0D8E4"/>
+                </a:solidFill>
+                <a:latin typeface="Calibri" pitchFamily="34" charset="0"/>
+                <a:ea typeface="Calibri" pitchFamily="34" charset="-122"/>
+                <a:cs typeface="Calibri" pitchFamily="34" charset="-120"/>
+              </a:rPr>
+              <a:t>Human-in-the-loop design: AI scores are advisory — teacher-validated scores enter the official record
+</a:t>
+            </a:r>
+            <a:r>
+              <a:rPr lang="en-US" sz="1200" b="1" dirty="0">
+                <a:solidFill>
+                  <a:srgbClr val="4A90D9"/>
+                </a:solidFill>
+                <a:latin typeface="Calibri" pitchFamily="34" charset="0"/>
+                <a:ea typeface="Calibri" pitchFamily="34" charset="-122"/>
+                <a:cs typeface="Calibri" pitchFamily="34" charset="-120"/>
+              </a:rPr>
+              <a:t>3  </a:t>
+            </a:r>
+            <a:r>
+              <a:rPr lang="en-US" sz="1200" dirty="0">
+                <a:solidFill>
+                  <a:srgbClr val="D0D8E4"/>
+                </a:solidFill>
+                <a:latin typeface="Calibri" pitchFamily="34" charset="0"/>
+                <a:ea typeface="Calibri" pitchFamily="34" charset="-122"/>
+                <a:cs typeface="Calibri" pitchFamily="34" charset="-120"/>
+              </a:rPr>
+              <a:t>SHAP explanations make the model's reasoning transparent and interrogable
+</a:t>
+            </a:r>
+            <a:r>
+              <a:rPr lang="en-US" sz="1200" b="1" dirty="0">
+                <a:solidFill>
+                  <a:srgbClr val="4A90D9"/>
+                </a:solidFill>
+                <a:latin typeface="Calibri" pitchFamily="34" charset="0"/>
+                <a:ea typeface="Calibri" pitchFamily="34" charset="-122"/>
+                <a:cs typeface="Calibri" pitchFamily="34" charset="-120"/>
+              </a:rPr>
+              <a:t>4  </a:t>
+            </a:r>
+            <a:r>
+              <a:rPr lang="en-US" sz="1200" dirty="0">
+                <a:solidFill>
+                  <a:srgbClr val="D0D8E4"/>
+                </a:solidFill>
+                <a:latin typeface="Calibri" pitchFamily="34" charset="0"/>
+                <a:ea typeface="Calibri" pitchFamily="34" charset="-122"/>
+                <a:cs typeface="Calibri" pitchFamily="34" charset="-120"/>
+              </a:rPr>
+              <a:t>Contextual design: cloud redundancy, progressive enhancement, and dual essay input address Myanmar's infrastructure realities
+</a:t>
+            </a:r>
+            <a:r>
+              <a:rPr lang="en-US" sz="1200" b="1" dirty="0">
+                <a:solidFill>
+                  <a:srgbClr val="4A90D9"/>
+                </a:solidFill>
+                <a:latin typeface="Calibri" pitchFamily="34" charset="0"/>
+                <a:ea typeface="Calibri" pitchFamily="34" charset="-122"/>
+                <a:cs typeface="Calibri" pitchFamily="34" charset="-120"/>
+              </a:rPr>
+              <a:t>5  </a:t>
+            </a:r>
+            <a:r>
+              <a:rPr lang="en-US" sz="1200" dirty="0">
+                <a:solidFill>
+                  <a:srgbClr val="D0D8E4"/>
+                </a:solidFill>
+                <a:latin typeface="Calibri" pitchFamily="34" charset="0"/>
+                <a:ea typeface="Calibri" pitchFamily="34" charset="-122"/>
+                <a:cs typeface="Calibri" pitchFamily="34" charset="-120"/>
+              </a:rPr>
+              <a:t>Augmentation, not automation — teachers gain time for judgment-based work that machines cannot yet replicate</a:t>
+            </a:r>
+            <a:endParaRPr lang="en-US" sz="1200" dirty="0"/>
+          </a:p>
+        </p:txBody>
+      </p:sp>
+      <p:sp>
+        <p:nvSpPr>
+          <p:cNvPr id="5" name="Text 3"/>
+          <p:cNvSpPr/>
+          <p:nvPr/>
+        </p:nvSpPr>
+        <p:spPr>
+          <a:xfrm>
+            <a:off x="685800" y="4709160"/>
+            <a:ext cx="7772400" cy="274320"/>
+          </a:xfrm>
+          <a:prstGeom prst="rect">
+            <a:avLst/>
+          </a:prstGeom>
+          <a:noFill/>
+          <a:ln/>
+        </p:spPr>
+        <p:txBody>
+          <a:bodyPr wrap="square" lIns="0" tIns="0" rIns="0" bIns="0" rtlCol="0" anchor="ctr"/>
+          <a:lstStyle/>
+          <a:p>
+            <a:pPr marL="0" indent="0">
+              <a:buNone/>
+            </a:pPr>
+            <a:endParaRPr lang="en-US" sz="1000" dirty="0"/>
+          </a:p>
+        </p:txBody>
       </p:sp>
     </p:spTree>
   </p:cSld>
